--- a/JD_tractor_jd425.pptx
+++ b/JD_tractor_jd425.pptx
@@ -261,7 +261,7 @@
           <a:lstStyle/>
           <a:p>
             <a:fld id="{16286276-9013-2A43-82D1-BA4685C95117}" type="datetimeFigureOut">
-              <a:t>10/8/22</a:t>
+              <a:t>3/30/24</a:t>
             </a:fld>
             <a:endParaRPr lang="en-US"/>
           </a:p>
@@ -457,7 +457,7 @@
           <a:lstStyle/>
           <a:p>
             <a:fld id="{16286276-9013-2A43-82D1-BA4685C95117}" type="datetimeFigureOut">
-              <a:t>10/8/22</a:t>
+              <a:t>3/30/24</a:t>
             </a:fld>
             <a:endParaRPr lang="en-US"/>
           </a:p>
@@ -663,7 +663,7 @@
           <a:lstStyle/>
           <a:p>
             <a:fld id="{16286276-9013-2A43-82D1-BA4685C95117}" type="datetimeFigureOut">
-              <a:t>10/8/22</a:t>
+              <a:t>3/30/24</a:t>
             </a:fld>
             <a:endParaRPr lang="en-US"/>
           </a:p>
@@ -859,7 +859,7 @@
           <a:lstStyle/>
           <a:p>
             <a:fld id="{16286276-9013-2A43-82D1-BA4685C95117}" type="datetimeFigureOut">
-              <a:t>10/8/22</a:t>
+              <a:t>3/30/24</a:t>
             </a:fld>
             <a:endParaRPr lang="en-US"/>
           </a:p>
@@ -1132,7 +1132,7 @@
           <a:lstStyle/>
           <a:p>
             <a:fld id="{16286276-9013-2A43-82D1-BA4685C95117}" type="datetimeFigureOut">
-              <a:t>10/8/22</a:t>
+              <a:t>3/30/24</a:t>
             </a:fld>
             <a:endParaRPr lang="en-US"/>
           </a:p>
@@ -1395,7 +1395,7 @@
           <a:lstStyle/>
           <a:p>
             <a:fld id="{16286276-9013-2A43-82D1-BA4685C95117}" type="datetimeFigureOut">
-              <a:t>10/8/22</a:t>
+              <a:t>3/30/24</a:t>
             </a:fld>
             <a:endParaRPr lang="en-US"/>
           </a:p>
@@ -1805,7 +1805,7 @@
           <a:lstStyle/>
           <a:p>
             <a:fld id="{16286276-9013-2A43-82D1-BA4685C95117}" type="datetimeFigureOut">
-              <a:t>10/8/22</a:t>
+              <a:t>3/30/24</a:t>
             </a:fld>
             <a:endParaRPr lang="en-US"/>
           </a:p>
@@ -1944,7 +1944,7 @@
           <a:lstStyle/>
           <a:p>
             <a:fld id="{16286276-9013-2A43-82D1-BA4685C95117}" type="datetimeFigureOut">
-              <a:t>10/8/22</a:t>
+              <a:t>3/30/24</a:t>
             </a:fld>
             <a:endParaRPr lang="en-US"/>
           </a:p>
@@ -2055,7 +2055,7 @@
           <a:lstStyle/>
           <a:p>
             <a:fld id="{16286276-9013-2A43-82D1-BA4685C95117}" type="datetimeFigureOut">
-              <a:t>10/8/22</a:t>
+              <a:t>3/30/24</a:t>
             </a:fld>
             <a:endParaRPr lang="en-US"/>
           </a:p>
@@ -2364,7 +2364,7 @@
           <a:lstStyle/>
           <a:p>
             <a:fld id="{16286276-9013-2A43-82D1-BA4685C95117}" type="datetimeFigureOut">
-              <a:t>10/8/22</a:t>
+              <a:t>3/30/24</a:t>
             </a:fld>
             <a:endParaRPr lang="en-US"/>
           </a:p>
@@ -2650,7 +2650,7 @@
           <a:lstStyle/>
           <a:p>
             <a:fld id="{16286276-9013-2A43-82D1-BA4685C95117}" type="datetimeFigureOut">
-              <a:t>10/8/22</a:t>
+              <a:t>3/30/24</a:t>
             </a:fld>
             <a:endParaRPr lang="en-US"/>
           </a:p>
@@ -2889,7 +2889,7 @@
           </a:lstStyle>
           <a:p>
             <a:fld id="{16286276-9013-2A43-82D1-BA4685C95117}" type="datetimeFigureOut">
-              <a:t>10/8/22</a:t>
+              <a:t>3/30/24</a:t>
             </a:fld>
             <a:endParaRPr lang="en-US"/>
           </a:p>
@@ -5527,7 +5527,7 @@
                     <a:lstStyle/>
                     <a:p>
                       <a:r>
-                        <a:rPr lang="en-US" sz="1200" b="1">
+                        <a:rPr lang="en-US" sz="1200" b="1" dirty="0">
                           <a:solidFill>
                             <a:srgbClr val="FF0000"/>
                           </a:solidFill>
@@ -5657,7 +5657,7 @@
                     <a:lstStyle/>
                     <a:p>
                       <a:r>
-                        <a:rPr lang="en-US" sz="1200"/>
+                        <a:rPr lang="en-US" sz="1200" dirty="0"/>
                         <a:t>6-20</a:t>
                       </a:r>
                     </a:p>
@@ -5741,6 +5741,83 @@
             <a:r>
               <a:rPr lang="en-US" sz="1400"/>
               <a:t>We may need to install Tire Tubes (~$15 each)</a:t>
+            </a:r>
+          </a:p>
+        </p:txBody>
+      </p:sp>
+      <p:sp>
+        <p:nvSpPr>
+          <p:cNvPr id="11" name="TextBox 10">
+            <a:extLst>
+              <a:ext uri="{FF2B5EF4-FFF2-40B4-BE49-F238E27FC236}">
+                <a16:creationId xmlns:a16="http://schemas.microsoft.com/office/drawing/2014/main" id="{551FAAFC-A792-9C3E-9ECE-DB24A47CDCA6}"/>
+              </a:ext>
+            </a:extLst>
+          </p:cNvPr>
+          <p:cNvSpPr txBox="1"/>
+          <p:nvPr/>
+        </p:nvSpPr>
+        <p:spPr>
+          <a:xfrm>
+            <a:off x="756745" y="2191033"/>
+            <a:ext cx="3037489" cy="861774"/>
+          </a:xfrm>
+          <a:prstGeom prst="rect">
+            <a:avLst/>
+          </a:prstGeom>
+          <a:noFill/>
+        </p:spPr>
+        <p:txBody>
+          <a:bodyPr wrap="square" rtlCol="0">
+            <a:spAutoFit/>
+          </a:bodyPr>
+          <a:lstStyle/>
+          <a:p>
+            <a:r>
+              <a:rPr lang="en-US" sz="1400" b="1" dirty="0">
+                <a:solidFill>
+                  <a:srgbClr val="FF0000"/>
+                </a:solidFill>
+                <a:latin typeface="Calibri" panose="020F0502020204030204" pitchFamily="34" charset="0"/>
+                <a:ea typeface="Menlo" panose="020B0609030804020204" pitchFamily="49" charset="0"/>
+                <a:cs typeface="Calibri" panose="020F0502020204030204" pitchFamily="34" charset="0"/>
+              </a:rPr>
+              <a:t>Tire "23 x 10.5 – 12":</a:t>
+            </a:r>
+          </a:p>
+          <a:p>
+            <a:r>
+              <a:rPr lang="en-US" sz="1200" dirty="0">
+                <a:latin typeface="Menlo" panose="020B0609030804020204" pitchFamily="49" charset="0"/>
+                <a:ea typeface="Menlo" panose="020B0609030804020204" pitchFamily="49" charset="0"/>
+                <a:cs typeface="Menlo" panose="020B0609030804020204" pitchFamily="49" charset="0"/>
+              </a:rPr>
+              <a:t>  23"   = overall diameter</a:t>
+            </a:r>
+          </a:p>
+          <a:p>
+            <a:r>
+              <a:rPr lang="en-US" sz="1200" dirty="0">
+                <a:latin typeface="Menlo" panose="020B0609030804020204" pitchFamily="49" charset="0"/>
+                <a:ea typeface="Menlo" panose="020B0609030804020204" pitchFamily="49" charset="0"/>
+                <a:cs typeface="Menlo" panose="020B0609030804020204" pitchFamily="49" charset="0"/>
+              </a:rPr>
+              <a:t>  10.5" = width of the tire</a:t>
+            </a:r>
+            <a:br>
+              <a:rPr lang="en-US" sz="1200" dirty="0">
+                <a:latin typeface="Menlo" panose="020B0609030804020204" pitchFamily="49" charset="0"/>
+                <a:ea typeface="Menlo" panose="020B0609030804020204" pitchFamily="49" charset="0"/>
+                <a:cs typeface="Menlo" panose="020B0609030804020204" pitchFamily="49" charset="0"/>
+              </a:rPr>
+            </a:br>
+            <a:r>
+              <a:rPr lang="en-US" sz="1200" dirty="0">
+                <a:latin typeface="Menlo" panose="020B0609030804020204" pitchFamily="49" charset="0"/>
+                <a:ea typeface="Menlo" panose="020B0609030804020204" pitchFamily="49" charset="0"/>
+                <a:cs typeface="Menlo" panose="020B0609030804020204" pitchFamily="49" charset="0"/>
+              </a:rPr>
+              <a:t>  12"   = rim diameter</a:t>
             </a:r>
           </a:p>
         </p:txBody>

--- a/JD_tractor_jd425.pptx
+++ b/JD_tractor_jd425.pptx
@@ -9,6 +9,7 @@
     <p:sldId id="277" r:id="rId3"/>
     <p:sldId id="279" r:id="rId4"/>
     <p:sldId id="280" r:id="rId5"/>
+    <p:sldId id="281" r:id="rId6"/>
   </p:sldIdLst>
   <p:sldSz cx="12192000" cy="6858000"/>
   <p:notesSz cx="6858000" cy="9144000"/>
@@ -261,7 +262,7 @@
           <a:lstStyle/>
           <a:p>
             <a:fld id="{16286276-9013-2A43-82D1-BA4685C95117}" type="datetimeFigureOut">
-              <a:t>3/30/24</a:t>
+              <a:t>6/12/24</a:t>
             </a:fld>
             <a:endParaRPr lang="en-US"/>
           </a:p>
@@ -457,7 +458,7 @@
           <a:lstStyle/>
           <a:p>
             <a:fld id="{16286276-9013-2A43-82D1-BA4685C95117}" type="datetimeFigureOut">
-              <a:t>3/30/24</a:t>
+              <a:t>6/12/24</a:t>
             </a:fld>
             <a:endParaRPr lang="en-US"/>
           </a:p>
@@ -663,7 +664,7 @@
           <a:lstStyle/>
           <a:p>
             <a:fld id="{16286276-9013-2A43-82D1-BA4685C95117}" type="datetimeFigureOut">
-              <a:t>3/30/24</a:t>
+              <a:t>6/12/24</a:t>
             </a:fld>
             <a:endParaRPr lang="en-US"/>
           </a:p>
@@ -859,7 +860,7 @@
           <a:lstStyle/>
           <a:p>
             <a:fld id="{16286276-9013-2A43-82D1-BA4685C95117}" type="datetimeFigureOut">
-              <a:t>3/30/24</a:t>
+              <a:t>6/12/24</a:t>
             </a:fld>
             <a:endParaRPr lang="en-US"/>
           </a:p>
@@ -1132,7 +1133,7 @@
           <a:lstStyle/>
           <a:p>
             <a:fld id="{16286276-9013-2A43-82D1-BA4685C95117}" type="datetimeFigureOut">
-              <a:t>3/30/24</a:t>
+              <a:t>6/12/24</a:t>
             </a:fld>
             <a:endParaRPr lang="en-US"/>
           </a:p>
@@ -1395,7 +1396,7 @@
           <a:lstStyle/>
           <a:p>
             <a:fld id="{16286276-9013-2A43-82D1-BA4685C95117}" type="datetimeFigureOut">
-              <a:t>3/30/24</a:t>
+              <a:t>6/12/24</a:t>
             </a:fld>
             <a:endParaRPr lang="en-US"/>
           </a:p>
@@ -1805,7 +1806,7 @@
           <a:lstStyle/>
           <a:p>
             <a:fld id="{16286276-9013-2A43-82D1-BA4685C95117}" type="datetimeFigureOut">
-              <a:t>3/30/24</a:t>
+              <a:t>6/12/24</a:t>
             </a:fld>
             <a:endParaRPr lang="en-US"/>
           </a:p>
@@ -1944,7 +1945,7 @@
           <a:lstStyle/>
           <a:p>
             <a:fld id="{16286276-9013-2A43-82D1-BA4685C95117}" type="datetimeFigureOut">
-              <a:t>3/30/24</a:t>
+              <a:t>6/12/24</a:t>
             </a:fld>
             <a:endParaRPr lang="en-US"/>
           </a:p>
@@ -2055,7 +2056,7 @@
           <a:lstStyle/>
           <a:p>
             <a:fld id="{16286276-9013-2A43-82D1-BA4685C95117}" type="datetimeFigureOut">
-              <a:t>3/30/24</a:t>
+              <a:t>6/12/24</a:t>
             </a:fld>
             <a:endParaRPr lang="en-US"/>
           </a:p>
@@ -2364,7 +2365,7 @@
           <a:lstStyle/>
           <a:p>
             <a:fld id="{16286276-9013-2A43-82D1-BA4685C95117}" type="datetimeFigureOut">
-              <a:t>3/30/24</a:t>
+              <a:t>6/12/24</a:t>
             </a:fld>
             <a:endParaRPr lang="en-US"/>
           </a:p>
@@ -2650,7 +2651,7 @@
           <a:lstStyle/>
           <a:p>
             <a:fld id="{16286276-9013-2A43-82D1-BA4685C95117}" type="datetimeFigureOut">
-              <a:t>3/30/24</a:t>
+              <a:t>6/12/24</a:t>
             </a:fld>
             <a:endParaRPr lang="en-US"/>
           </a:p>
@@ -2889,7 +2890,7 @@
           </a:lstStyle>
           <a:p>
             <a:fld id="{16286276-9013-2A43-82D1-BA4685C95117}" type="datetimeFigureOut">
-              <a:t>3/30/24</a:t>
+              <a:t>6/12/24</a:t>
             </a:fld>
             <a:endParaRPr lang="en-US"/>
           </a:p>
@@ -5835,6 +5836,1729 @@
 </p:sld>
 </file>
 
+<file path=ppt/slides/slide5.xml><?xml version="1.0" encoding="utf-8"?>
+<p:sld xmlns:a="http://schemas.openxmlformats.org/drawingml/2006/main" xmlns:r="http://schemas.openxmlformats.org/officeDocument/2006/relationships" xmlns:p="http://schemas.openxmlformats.org/presentationml/2006/main">
+  <p:cSld>
+    <p:spTree>
+      <p:nvGrpSpPr>
+        <p:cNvPr id="1" name=""/>
+        <p:cNvGrpSpPr/>
+        <p:nvPr/>
+      </p:nvGrpSpPr>
+      <p:grpSpPr>
+        <a:xfrm>
+          <a:off x="0" y="0"/>
+          <a:ext cx="0" cy="0"/>
+          <a:chOff x="0" y="0"/>
+          <a:chExt cx="0" cy="0"/>
+        </a:xfrm>
+      </p:grpSpPr>
+      <p:sp>
+        <p:nvSpPr>
+          <p:cNvPr id="36" name="Rectangle 35">
+            <a:extLst>
+              <a:ext uri="{FF2B5EF4-FFF2-40B4-BE49-F238E27FC236}">
+                <a16:creationId xmlns:a16="http://schemas.microsoft.com/office/drawing/2014/main" id="{C2E3CF2A-C4BA-5DFD-36CB-DAC810B0D3BB}"/>
+              </a:ext>
+            </a:extLst>
+          </p:cNvPr>
+          <p:cNvSpPr/>
+          <p:nvPr/>
+        </p:nvSpPr>
+        <p:spPr>
+          <a:xfrm>
+            <a:off x="4737983" y="1900438"/>
+            <a:ext cx="2315963" cy="276999"/>
+          </a:xfrm>
+          <a:prstGeom prst="rect">
+            <a:avLst/>
+          </a:prstGeom>
+          <a:solidFill>
+            <a:schemeClr val="bg1">
+              <a:lumMod val="85000"/>
+            </a:schemeClr>
+          </a:solidFill>
+          <a:ln>
+            <a:noFill/>
+          </a:ln>
+        </p:spPr>
+        <p:style>
+          <a:lnRef idx="2">
+            <a:schemeClr val="accent1">
+              <a:shade val="15000"/>
+            </a:schemeClr>
+          </a:lnRef>
+          <a:fillRef idx="1">
+            <a:schemeClr val="accent1"/>
+          </a:fillRef>
+          <a:effectRef idx="0">
+            <a:schemeClr val="accent1"/>
+          </a:effectRef>
+          <a:fontRef idx="minor">
+            <a:schemeClr val="lt1"/>
+          </a:fontRef>
+        </p:style>
+        <p:txBody>
+          <a:bodyPr rtlCol="0" anchor="ctr"/>
+          <a:lstStyle/>
+          <a:p>
+            <a:pPr algn="ctr"/>
+            <a:endParaRPr lang="en-US"/>
+          </a:p>
+        </p:txBody>
+      </p:sp>
+      <p:sp>
+        <p:nvSpPr>
+          <p:cNvPr id="2" name="TextBox 1">
+            <a:extLst>
+              <a:ext uri="{FF2B5EF4-FFF2-40B4-BE49-F238E27FC236}">
+                <a16:creationId xmlns:a16="http://schemas.microsoft.com/office/drawing/2014/main" id="{F1D4F527-8FD9-2801-24F0-71FFECCC11E0}"/>
+              </a:ext>
+            </a:extLst>
+          </p:cNvPr>
+          <p:cNvSpPr txBox="1"/>
+          <p:nvPr/>
+        </p:nvSpPr>
+        <p:spPr>
+          <a:xfrm>
+            <a:off x="168166" y="111093"/>
+            <a:ext cx="4117119" cy="523220"/>
+          </a:xfrm>
+          <a:prstGeom prst="rect">
+            <a:avLst/>
+          </a:prstGeom>
+          <a:noFill/>
+        </p:spPr>
+        <p:txBody>
+          <a:bodyPr wrap="square" rtlCol="0">
+            <a:spAutoFit/>
+          </a:bodyPr>
+          <a:lstStyle/>
+          <a:p>
+            <a:r>
+              <a:rPr lang="en-US" sz="2800" b="1" dirty="0"/>
+              <a:t>60" deck, spindles, pulley</a:t>
+            </a:r>
+          </a:p>
+        </p:txBody>
+      </p:sp>
+      <p:pic>
+        <p:nvPicPr>
+          <p:cNvPr id="12" name="Picture 11">
+            <a:extLst>
+              <a:ext uri="{FF2B5EF4-FFF2-40B4-BE49-F238E27FC236}">
+                <a16:creationId xmlns:a16="http://schemas.microsoft.com/office/drawing/2014/main" id="{C1479CE6-79CE-470A-00DF-D0DC3AB57C5C}"/>
+              </a:ext>
+            </a:extLst>
+          </p:cNvPr>
+          <p:cNvPicPr>
+            <a:picLocks noChangeAspect="1"/>
+          </p:cNvPicPr>
+          <p:nvPr/>
+        </p:nvPicPr>
+        <p:blipFill>
+          <a:blip r:embed="rId2" cstate="email">
+            <a:extLst>
+              <a:ext uri="{28A0092B-C50C-407E-A947-70E740481C1C}">
+                <a14:useLocalDpi xmlns:a14="http://schemas.microsoft.com/office/drawing/2010/main"/>
+              </a:ext>
+            </a:extLst>
+          </a:blip>
+          <a:stretch>
+            <a:fillRect/>
+          </a:stretch>
+        </p:blipFill>
+        <p:spPr>
+          <a:xfrm>
+            <a:off x="9625831" y="111093"/>
+            <a:ext cx="2507532" cy="2584450"/>
+          </a:xfrm>
+          <a:prstGeom prst="rect">
+            <a:avLst/>
+          </a:prstGeom>
+        </p:spPr>
+      </p:pic>
+      <p:pic>
+        <p:nvPicPr>
+          <p:cNvPr id="14" name="Picture 13">
+            <a:extLst>
+              <a:ext uri="{FF2B5EF4-FFF2-40B4-BE49-F238E27FC236}">
+                <a16:creationId xmlns:a16="http://schemas.microsoft.com/office/drawing/2014/main" id="{2F294491-F267-467A-5C27-39D573011A33}"/>
+              </a:ext>
+            </a:extLst>
+          </p:cNvPr>
+          <p:cNvPicPr>
+            <a:picLocks noChangeAspect="1"/>
+          </p:cNvPicPr>
+          <p:nvPr/>
+        </p:nvPicPr>
+        <p:blipFill>
+          <a:blip r:embed="rId3" cstate="email">
+            <a:extLst>
+              <a:ext uri="{28A0092B-C50C-407E-A947-70E740481C1C}">
+                <a14:useLocalDpi xmlns:a14="http://schemas.microsoft.com/office/drawing/2010/main"/>
+              </a:ext>
+            </a:extLst>
+          </a:blip>
+          <a:stretch>
+            <a:fillRect/>
+          </a:stretch>
+        </p:blipFill>
+        <p:spPr>
+          <a:xfrm>
+            <a:off x="168166" y="1071507"/>
+            <a:ext cx="1825964" cy="2357494"/>
+          </a:xfrm>
+          <a:prstGeom prst="rect">
+            <a:avLst/>
+          </a:prstGeom>
+        </p:spPr>
+      </p:pic>
+      <p:pic>
+        <p:nvPicPr>
+          <p:cNvPr id="15" name="Picture 14">
+            <a:extLst>
+              <a:ext uri="{FF2B5EF4-FFF2-40B4-BE49-F238E27FC236}">
+                <a16:creationId xmlns:a16="http://schemas.microsoft.com/office/drawing/2014/main" id="{77A4297F-2B7A-25DD-8F34-0CE6143B95A0}"/>
+              </a:ext>
+            </a:extLst>
+          </p:cNvPr>
+          <p:cNvPicPr>
+            <a:picLocks noChangeAspect="1"/>
+          </p:cNvPicPr>
+          <p:nvPr/>
+        </p:nvPicPr>
+        <p:blipFill>
+          <a:blip r:embed="rId4" cstate="email">
+            <a:extLst>
+              <a:ext uri="{28A0092B-C50C-407E-A947-70E740481C1C}">
+                <a14:useLocalDpi xmlns:a14="http://schemas.microsoft.com/office/drawing/2010/main"/>
+              </a:ext>
+            </a:extLst>
+          </a:blip>
+          <a:stretch>
+            <a:fillRect/>
+          </a:stretch>
+        </p:blipFill>
+        <p:spPr>
+          <a:xfrm>
+            <a:off x="5436266" y="4463045"/>
+            <a:ext cx="703281" cy="1777860"/>
+          </a:xfrm>
+          <a:prstGeom prst="rect">
+            <a:avLst/>
+          </a:prstGeom>
+        </p:spPr>
+      </p:pic>
+      <p:sp>
+        <p:nvSpPr>
+          <p:cNvPr id="17" name="TextBox 16">
+            <a:extLst>
+              <a:ext uri="{FF2B5EF4-FFF2-40B4-BE49-F238E27FC236}">
+                <a16:creationId xmlns:a16="http://schemas.microsoft.com/office/drawing/2014/main" id="{6492CF95-2AC8-AFDC-A4D0-B7CC74B71E15}"/>
+              </a:ext>
+            </a:extLst>
+          </p:cNvPr>
+          <p:cNvSpPr txBox="1"/>
+          <p:nvPr/>
+        </p:nvSpPr>
+        <p:spPr>
+          <a:xfrm>
+            <a:off x="431548" y="3430811"/>
+            <a:ext cx="1022350" cy="276999"/>
+          </a:xfrm>
+          <a:prstGeom prst="rect">
+            <a:avLst/>
+          </a:prstGeom>
+          <a:noFill/>
+        </p:spPr>
+        <p:txBody>
+          <a:bodyPr wrap="square" rtlCol="0">
+            <a:spAutoFit/>
+          </a:bodyPr>
+          <a:lstStyle/>
+          <a:p>
+            <a:pPr algn="ctr"/>
+            <a:r>
+              <a:rPr lang="en-US" sz="1200" dirty="0"/>
+              <a:t>deck</a:t>
+            </a:r>
+          </a:p>
+        </p:txBody>
+      </p:sp>
+      <p:pic>
+        <p:nvPicPr>
+          <p:cNvPr id="18" name="Picture 17">
+            <a:extLst>
+              <a:ext uri="{FF2B5EF4-FFF2-40B4-BE49-F238E27FC236}">
+                <a16:creationId xmlns:a16="http://schemas.microsoft.com/office/drawing/2014/main" id="{E303D0F3-578A-310B-426D-6CDE9F2CDD23}"/>
+              </a:ext>
+            </a:extLst>
+          </p:cNvPr>
+          <p:cNvPicPr>
+            <a:picLocks noChangeAspect="1"/>
+          </p:cNvPicPr>
+          <p:nvPr/>
+        </p:nvPicPr>
+        <p:blipFill>
+          <a:blip r:embed="rId5" cstate="email">
+            <a:extLst>
+              <a:ext uri="{28A0092B-C50C-407E-A947-70E740481C1C}">
+                <a14:useLocalDpi xmlns:a14="http://schemas.microsoft.com/office/drawing/2010/main"/>
+              </a:ext>
+            </a:extLst>
+          </a:blip>
+          <a:stretch>
+            <a:fillRect/>
+          </a:stretch>
+        </p:blipFill>
+        <p:spPr>
+          <a:xfrm>
+            <a:off x="2159280" y="1069920"/>
+            <a:ext cx="1677934" cy="1704628"/>
+          </a:xfrm>
+          <a:prstGeom prst="rect">
+            <a:avLst/>
+          </a:prstGeom>
+        </p:spPr>
+      </p:pic>
+      <p:sp>
+        <p:nvSpPr>
+          <p:cNvPr id="19" name="TextBox 18">
+            <a:extLst>
+              <a:ext uri="{FF2B5EF4-FFF2-40B4-BE49-F238E27FC236}">
+                <a16:creationId xmlns:a16="http://schemas.microsoft.com/office/drawing/2014/main" id="{1867E133-035E-7D82-3455-0D83F0E76CB8}"/>
+              </a:ext>
+            </a:extLst>
+          </p:cNvPr>
+          <p:cNvSpPr txBox="1"/>
+          <p:nvPr/>
+        </p:nvSpPr>
+        <p:spPr>
+          <a:xfrm>
+            <a:off x="2424455" y="2834042"/>
+            <a:ext cx="1022350" cy="461665"/>
+          </a:xfrm>
+          <a:prstGeom prst="rect">
+            <a:avLst/>
+          </a:prstGeom>
+          <a:noFill/>
+        </p:spPr>
+        <p:txBody>
+          <a:bodyPr wrap="square" rtlCol="0">
+            <a:spAutoFit/>
+          </a:bodyPr>
+          <a:lstStyle/>
+          <a:p>
+            <a:pPr algn="ctr"/>
+            <a:r>
+              <a:rPr lang="en-US" sz="1200" dirty="0"/>
+              <a:t>spindle hub</a:t>
+            </a:r>
+          </a:p>
+          <a:p>
+            <a:pPr algn="ctr"/>
+            <a:r>
+              <a:rPr lang="en-US" sz="1200" dirty="0"/>
+              <a:t>with pulley</a:t>
+            </a:r>
+          </a:p>
+        </p:txBody>
+      </p:sp>
+      <p:pic>
+        <p:nvPicPr>
+          <p:cNvPr id="20" name="Picture 19">
+            <a:extLst>
+              <a:ext uri="{FF2B5EF4-FFF2-40B4-BE49-F238E27FC236}">
+                <a16:creationId xmlns:a16="http://schemas.microsoft.com/office/drawing/2014/main" id="{8E2DAB17-A81B-70EB-9854-F59478032EFD}"/>
+              </a:ext>
+            </a:extLst>
+          </p:cNvPr>
+          <p:cNvPicPr>
+            <a:picLocks noChangeAspect="1"/>
+          </p:cNvPicPr>
+          <p:nvPr/>
+        </p:nvPicPr>
+        <p:blipFill>
+          <a:blip r:embed="rId6" cstate="email">
+            <a:extLst>
+              <a:ext uri="{28A0092B-C50C-407E-A947-70E740481C1C}">
+                <a14:useLocalDpi xmlns:a14="http://schemas.microsoft.com/office/drawing/2010/main"/>
+              </a:ext>
+            </a:extLst>
+          </a:blip>
+          <a:stretch>
+            <a:fillRect/>
+          </a:stretch>
+        </p:blipFill>
+        <p:spPr>
+          <a:xfrm>
+            <a:off x="10128935" y="5654514"/>
+            <a:ext cx="1971754" cy="1162193"/>
+          </a:xfrm>
+          <a:prstGeom prst="rect">
+            <a:avLst/>
+          </a:prstGeom>
+        </p:spPr>
+      </p:pic>
+      <p:sp>
+        <p:nvSpPr>
+          <p:cNvPr id="21" name="TextBox 20">
+            <a:extLst>
+              <a:ext uri="{FF2B5EF4-FFF2-40B4-BE49-F238E27FC236}">
+                <a16:creationId xmlns:a16="http://schemas.microsoft.com/office/drawing/2014/main" id="{81E3D317-D771-666D-55D6-D034003A33DC}"/>
+              </a:ext>
+            </a:extLst>
+          </p:cNvPr>
+          <p:cNvSpPr txBox="1"/>
+          <p:nvPr/>
+        </p:nvSpPr>
+        <p:spPr>
+          <a:xfrm>
+            <a:off x="10368422" y="2695543"/>
+            <a:ext cx="1022350" cy="276999"/>
+          </a:xfrm>
+          <a:prstGeom prst="rect">
+            <a:avLst/>
+          </a:prstGeom>
+          <a:noFill/>
+        </p:spPr>
+        <p:txBody>
+          <a:bodyPr wrap="square" rtlCol="0">
+            <a:spAutoFit/>
+          </a:bodyPr>
+          <a:lstStyle/>
+          <a:p>
+            <a:pPr algn="ctr"/>
+            <a:r>
+              <a:rPr lang="en-US" sz="1200" dirty="0"/>
+              <a:t>spindle shaft</a:t>
+            </a:r>
+          </a:p>
+        </p:txBody>
+      </p:sp>
+      <p:sp>
+        <p:nvSpPr>
+          <p:cNvPr id="22" name="Rectangle 21">
+            <a:extLst>
+              <a:ext uri="{FF2B5EF4-FFF2-40B4-BE49-F238E27FC236}">
+                <a16:creationId xmlns:a16="http://schemas.microsoft.com/office/drawing/2014/main" id="{BE6CE2D1-947C-418A-CBDC-AC5FACC5B62D}"/>
+              </a:ext>
+            </a:extLst>
+          </p:cNvPr>
+          <p:cNvSpPr/>
+          <p:nvPr/>
+        </p:nvSpPr>
+        <p:spPr>
+          <a:xfrm>
+            <a:off x="5268689" y="2692078"/>
+            <a:ext cx="1093076" cy="231379"/>
+          </a:xfrm>
+          <a:prstGeom prst="rect">
+            <a:avLst/>
+          </a:prstGeom>
+          <a:noFill/>
+          <a:ln w="25400"/>
+        </p:spPr>
+        <p:style>
+          <a:lnRef idx="2">
+            <a:schemeClr val="accent1">
+              <a:shade val="15000"/>
+            </a:schemeClr>
+          </a:lnRef>
+          <a:fillRef idx="1">
+            <a:schemeClr val="accent1"/>
+          </a:fillRef>
+          <a:effectRef idx="0">
+            <a:schemeClr val="accent1"/>
+          </a:effectRef>
+          <a:fontRef idx="minor">
+            <a:schemeClr val="lt1"/>
+          </a:fontRef>
+        </p:style>
+        <p:txBody>
+          <a:bodyPr rtlCol="0" anchor="ctr"/>
+          <a:lstStyle/>
+          <a:p>
+            <a:pPr algn="ctr"/>
+            <a:endParaRPr lang="en-US"/>
+          </a:p>
+        </p:txBody>
+      </p:sp>
+      <p:sp>
+        <p:nvSpPr>
+          <p:cNvPr id="23" name="Rectangle 22">
+            <a:extLst>
+              <a:ext uri="{FF2B5EF4-FFF2-40B4-BE49-F238E27FC236}">
+                <a16:creationId xmlns:a16="http://schemas.microsoft.com/office/drawing/2014/main" id="{70DE2D15-4CE0-62E9-50F6-265C6ADECA33}"/>
+              </a:ext>
+            </a:extLst>
+          </p:cNvPr>
+          <p:cNvSpPr/>
+          <p:nvPr/>
+        </p:nvSpPr>
+        <p:spPr>
+          <a:xfrm>
+            <a:off x="5268689" y="4109479"/>
+            <a:ext cx="1093076" cy="279969"/>
+          </a:xfrm>
+          <a:prstGeom prst="rect">
+            <a:avLst/>
+          </a:prstGeom>
+          <a:noFill/>
+          <a:ln w="25400"/>
+        </p:spPr>
+        <p:style>
+          <a:lnRef idx="2">
+            <a:schemeClr val="accent1">
+              <a:shade val="15000"/>
+            </a:schemeClr>
+          </a:lnRef>
+          <a:fillRef idx="1">
+            <a:schemeClr val="accent1"/>
+          </a:fillRef>
+          <a:effectRef idx="0">
+            <a:schemeClr val="accent1"/>
+          </a:effectRef>
+          <a:fontRef idx="minor">
+            <a:schemeClr val="lt1"/>
+          </a:fontRef>
+        </p:style>
+        <p:txBody>
+          <a:bodyPr rtlCol="0" anchor="ctr"/>
+          <a:lstStyle/>
+          <a:p>
+            <a:pPr algn="ctr"/>
+            <a:endParaRPr lang="en-US"/>
+          </a:p>
+        </p:txBody>
+      </p:sp>
+      <p:sp>
+        <p:nvSpPr>
+          <p:cNvPr id="24" name="Rectangle 23">
+            <a:extLst>
+              <a:ext uri="{FF2B5EF4-FFF2-40B4-BE49-F238E27FC236}">
+                <a16:creationId xmlns:a16="http://schemas.microsoft.com/office/drawing/2014/main" id="{504C9A0E-2E24-F432-26C9-3EF68C22B118}"/>
+              </a:ext>
+            </a:extLst>
+          </p:cNvPr>
+          <p:cNvSpPr/>
+          <p:nvPr/>
+        </p:nvSpPr>
+        <p:spPr>
+          <a:xfrm>
+            <a:off x="5475519" y="2692074"/>
+            <a:ext cx="141514" cy="231379"/>
+          </a:xfrm>
+          <a:prstGeom prst="rect">
+            <a:avLst/>
+          </a:prstGeom>
+          <a:noFill/>
+          <a:ln w="25400"/>
+        </p:spPr>
+        <p:style>
+          <a:lnRef idx="2">
+            <a:schemeClr val="accent1">
+              <a:shade val="15000"/>
+            </a:schemeClr>
+          </a:lnRef>
+          <a:fillRef idx="1">
+            <a:schemeClr val="accent1"/>
+          </a:fillRef>
+          <a:effectRef idx="0">
+            <a:schemeClr val="accent1"/>
+          </a:effectRef>
+          <a:fontRef idx="minor">
+            <a:schemeClr val="lt1"/>
+          </a:fontRef>
+        </p:style>
+        <p:txBody>
+          <a:bodyPr rtlCol="0" anchor="ctr"/>
+          <a:lstStyle/>
+          <a:p>
+            <a:pPr algn="ctr"/>
+            <a:endParaRPr lang="en-US"/>
+          </a:p>
+        </p:txBody>
+      </p:sp>
+      <p:sp>
+        <p:nvSpPr>
+          <p:cNvPr id="25" name="Rectangle 24">
+            <a:extLst>
+              <a:ext uri="{FF2B5EF4-FFF2-40B4-BE49-F238E27FC236}">
+                <a16:creationId xmlns:a16="http://schemas.microsoft.com/office/drawing/2014/main" id="{C7B6222B-362C-651B-F211-DD0D38047193}"/>
+              </a:ext>
+            </a:extLst>
+          </p:cNvPr>
+          <p:cNvSpPr/>
+          <p:nvPr/>
+        </p:nvSpPr>
+        <p:spPr>
+          <a:xfrm>
+            <a:off x="5998033" y="2692072"/>
+            <a:ext cx="141514" cy="231379"/>
+          </a:xfrm>
+          <a:prstGeom prst="rect">
+            <a:avLst/>
+          </a:prstGeom>
+          <a:noFill/>
+          <a:ln w="25400"/>
+        </p:spPr>
+        <p:style>
+          <a:lnRef idx="2">
+            <a:schemeClr val="accent1">
+              <a:shade val="15000"/>
+            </a:schemeClr>
+          </a:lnRef>
+          <a:fillRef idx="1">
+            <a:schemeClr val="accent1"/>
+          </a:fillRef>
+          <a:effectRef idx="0">
+            <a:schemeClr val="accent1"/>
+          </a:effectRef>
+          <a:fontRef idx="minor">
+            <a:schemeClr val="lt1"/>
+          </a:fontRef>
+        </p:style>
+        <p:txBody>
+          <a:bodyPr rtlCol="0" anchor="ctr"/>
+          <a:lstStyle/>
+          <a:p>
+            <a:pPr algn="ctr"/>
+            <a:endParaRPr lang="en-US"/>
+          </a:p>
+        </p:txBody>
+      </p:sp>
+      <p:sp>
+        <p:nvSpPr>
+          <p:cNvPr id="27" name="Rectangle 26">
+            <a:extLst>
+              <a:ext uri="{FF2B5EF4-FFF2-40B4-BE49-F238E27FC236}">
+                <a16:creationId xmlns:a16="http://schemas.microsoft.com/office/drawing/2014/main" id="{01FF93C6-A6BE-89F8-126E-ABBCFD33F310}"/>
+              </a:ext>
+            </a:extLst>
+          </p:cNvPr>
+          <p:cNvSpPr/>
+          <p:nvPr/>
+        </p:nvSpPr>
+        <p:spPr>
+          <a:xfrm>
+            <a:off x="5475519" y="2344072"/>
+            <a:ext cx="664028" cy="170373"/>
+          </a:xfrm>
+          <a:prstGeom prst="rect">
+            <a:avLst/>
+          </a:prstGeom>
+          <a:noFill/>
+          <a:ln w="25400"/>
+        </p:spPr>
+        <p:style>
+          <a:lnRef idx="2">
+            <a:schemeClr val="accent1">
+              <a:shade val="15000"/>
+            </a:schemeClr>
+          </a:lnRef>
+          <a:fillRef idx="1">
+            <a:schemeClr val="accent1"/>
+          </a:fillRef>
+          <a:effectRef idx="0">
+            <a:schemeClr val="accent1"/>
+          </a:effectRef>
+          <a:fontRef idx="minor">
+            <a:schemeClr val="lt1"/>
+          </a:fontRef>
+        </p:style>
+        <p:txBody>
+          <a:bodyPr rtlCol="0" anchor="ctr"/>
+          <a:lstStyle/>
+          <a:p>
+            <a:pPr algn="ctr"/>
+            <a:endParaRPr lang="en-US"/>
+          </a:p>
+        </p:txBody>
+      </p:sp>
+      <p:sp>
+        <p:nvSpPr>
+          <p:cNvPr id="28" name="TextBox 27">
+            <a:extLst>
+              <a:ext uri="{FF2B5EF4-FFF2-40B4-BE49-F238E27FC236}">
+                <a16:creationId xmlns:a16="http://schemas.microsoft.com/office/drawing/2014/main" id="{6FD39C63-1EB5-761D-5983-7A07EC6CF263}"/>
+              </a:ext>
+            </a:extLst>
+          </p:cNvPr>
+          <p:cNvSpPr txBox="1"/>
+          <p:nvPr/>
+        </p:nvSpPr>
+        <p:spPr>
+          <a:xfrm>
+            <a:off x="4457538" y="2743107"/>
+            <a:ext cx="703336" cy="276999"/>
+          </a:xfrm>
+          <a:prstGeom prst="rect">
+            <a:avLst/>
+          </a:prstGeom>
+          <a:noFill/>
+        </p:spPr>
+        <p:txBody>
+          <a:bodyPr wrap="square" rtlCol="0">
+            <a:spAutoFit/>
+          </a:bodyPr>
+          <a:lstStyle/>
+          <a:p>
+            <a:pPr algn="ctr"/>
+            <a:r>
+              <a:rPr lang="en-US" sz="1200" dirty="0"/>
+              <a:t>bearing</a:t>
+            </a:r>
+          </a:p>
+        </p:txBody>
+      </p:sp>
+      <p:sp>
+        <p:nvSpPr>
+          <p:cNvPr id="29" name="TextBox 28">
+            <a:extLst>
+              <a:ext uri="{FF2B5EF4-FFF2-40B4-BE49-F238E27FC236}">
+                <a16:creationId xmlns:a16="http://schemas.microsoft.com/office/drawing/2014/main" id="{643779C3-2B68-3C5A-985B-0D08799055A1}"/>
+              </a:ext>
+            </a:extLst>
+          </p:cNvPr>
+          <p:cNvSpPr txBox="1"/>
+          <p:nvPr/>
+        </p:nvSpPr>
+        <p:spPr>
+          <a:xfrm>
+            <a:off x="4485477" y="4127721"/>
+            <a:ext cx="703336" cy="276999"/>
+          </a:xfrm>
+          <a:prstGeom prst="rect">
+            <a:avLst/>
+          </a:prstGeom>
+          <a:noFill/>
+        </p:spPr>
+        <p:txBody>
+          <a:bodyPr wrap="square" rtlCol="0">
+            <a:spAutoFit/>
+          </a:bodyPr>
+          <a:lstStyle/>
+          <a:p>
+            <a:pPr algn="ctr"/>
+            <a:r>
+              <a:rPr lang="en-US" sz="1200" dirty="0"/>
+              <a:t>bearing</a:t>
+            </a:r>
+          </a:p>
+        </p:txBody>
+      </p:sp>
+      <p:sp>
+        <p:nvSpPr>
+          <p:cNvPr id="30" name="TextBox 29">
+            <a:extLst>
+              <a:ext uri="{FF2B5EF4-FFF2-40B4-BE49-F238E27FC236}">
+                <a16:creationId xmlns:a16="http://schemas.microsoft.com/office/drawing/2014/main" id="{0F074E6E-B726-12A6-E956-1A7189378970}"/>
+              </a:ext>
+            </a:extLst>
+          </p:cNvPr>
+          <p:cNvSpPr txBox="1"/>
+          <p:nvPr/>
+        </p:nvSpPr>
+        <p:spPr>
+          <a:xfrm>
+            <a:off x="5290461" y="1900438"/>
+            <a:ext cx="1093076" cy="276999"/>
+          </a:xfrm>
+          <a:prstGeom prst="rect">
+            <a:avLst/>
+          </a:prstGeom>
+          <a:solidFill>
+            <a:schemeClr val="bg1">
+              <a:lumMod val="85000"/>
+            </a:schemeClr>
+          </a:solidFill>
+          <a:ln>
+            <a:noFill/>
+          </a:ln>
+        </p:spPr>
+        <p:txBody>
+          <a:bodyPr wrap="square" rtlCol="0">
+            <a:spAutoFit/>
+          </a:bodyPr>
+          <a:lstStyle/>
+          <a:p>
+            <a:pPr algn="ctr"/>
+            <a:r>
+              <a:rPr lang="en-US" sz="1200" dirty="0"/>
+              <a:t>pulley</a:t>
+            </a:r>
+          </a:p>
+        </p:txBody>
+      </p:sp>
+      <p:sp>
+        <p:nvSpPr>
+          <p:cNvPr id="31" name="TextBox 30">
+            <a:extLst>
+              <a:ext uri="{FF2B5EF4-FFF2-40B4-BE49-F238E27FC236}">
+                <a16:creationId xmlns:a16="http://schemas.microsoft.com/office/drawing/2014/main" id="{CB5BF55F-B1A5-116F-3FC8-D902CA203453}"/>
+              </a:ext>
+            </a:extLst>
+          </p:cNvPr>
+          <p:cNvSpPr txBox="1"/>
+          <p:nvPr/>
+        </p:nvSpPr>
+        <p:spPr>
+          <a:xfrm>
+            <a:off x="4876803" y="6281516"/>
+            <a:ext cx="1667621" cy="461665"/>
+          </a:xfrm>
+          <a:prstGeom prst="rect">
+            <a:avLst/>
+          </a:prstGeom>
+          <a:noFill/>
+        </p:spPr>
+        <p:txBody>
+          <a:bodyPr wrap="square" rtlCol="0">
+            <a:spAutoFit/>
+          </a:bodyPr>
+          <a:lstStyle/>
+          <a:p>
+            <a:pPr algn="ctr"/>
+            <a:r>
+              <a:rPr lang="en-US" sz="1200" dirty="0"/>
+              <a:t>spindle shaft </a:t>
+            </a:r>
+          </a:p>
+          <a:p>
+            <a:pPr algn="ctr"/>
+            <a:r>
+              <a:rPr lang="en-US" sz="1200" dirty="0"/>
+              <a:t>inserted from here</a:t>
+            </a:r>
+          </a:p>
+        </p:txBody>
+      </p:sp>
+      <p:sp>
+        <p:nvSpPr>
+          <p:cNvPr id="37" name="Right Triangle 36">
+            <a:extLst>
+              <a:ext uri="{FF2B5EF4-FFF2-40B4-BE49-F238E27FC236}">
+                <a16:creationId xmlns:a16="http://schemas.microsoft.com/office/drawing/2014/main" id="{6DF6BC8E-34EF-3787-57BB-7494DB4ACD5A}"/>
+              </a:ext>
+            </a:extLst>
+          </p:cNvPr>
+          <p:cNvSpPr/>
+          <p:nvPr/>
+        </p:nvSpPr>
+        <p:spPr>
+          <a:xfrm>
+            <a:off x="7053947" y="1902197"/>
+            <a:ext cx="315686" cy="275240"/>
+          </a:xfrm>
+          <a:prstGeom prst="rtTriangle">
+            <a:avLst/>
+          </a:prstGeom>
+          <a:solidFill>
+            <a:schemeClr val="bg1">
+              <a:lumMod val="85000"/>
+            </a:schemeClr>
+          </a:solidFill>
+          <a:ln>
+            <a:noFill/>
+          </a:ln>
+        </p:spPr>
+        <p:style>
+          <a:lnRef idx="2">
+            <a:schemeClr val="accent1">
+              <a:shade val="15000"/>
+            </a:schemeClr>
+          </a:lnRef>
+          <a:fillRef idx="1">
+            <a:schemeClr val="accent1"/>
+          </a:fillRef>
+          <a:effectRef idx="0">
+            <a:schemeClr val="accent1"/>
+          </a:effectRef>
+          <a:fontRef idx="minor">
+            <a:schemeClr val="lt1"/>
+          </a:fontRef>
+        </p:style>
+        <p:txBody>
+          <a:bodyPr rtlCol="0" anchor="ctr"/>
+          <a:lstStyle/>
+          <a:p>
+            <a:pPr algn="ctr"/>
+            <a:endParaRPr lang="en-US"/>
+          </a:p>
+        </p:txBody>
+      </p:sp>
+      <p:sp>
+        <p:nvSpPr>
+          <p:cNvPr id="38" name="Right Triangle 37">
+            <a:extLst>
+              <a:ext uri="{FF2B5EF4-FFF2-40B4-BE49-F238E27FC236}">
+                <a16:creationId xmlns:a16="http://schemas.microsoft.com/office/drawing/2014/main" id="{5432BF53-9EFC-EF94-770C-76DFC0C8DA69}"/>
+              </a:ext>
+            </a:extLst>
+          </p:cNvPr>
+          <p:cNvSpPr/>
+          <p:nvPr/>
+        </p:nvSpPr>
+        <p:spPr>
+          <a:xfrm rot="10800000" flipH="1">
+            <a:off x="7049313" y="1897411"/>
+            <a:ext cx="306997" cy="275240"/>
+          </a:xfrm>
+          <a:prstGeom prst="rtTriangle">
+            <a:avLst/>
+          </a:prstGeom>
+          <a:solidFill>
+            <a:schemeClr val="bg1">
+              <a:lumMod val="85000"/>
+            </a:schemeClr>
+          </a:solidFill>
+          <a:ln>
+            <a:noFill/>
+          </a:ln>
+        </p:spPr>
+        <p:style>
+          <a:lnRef idx="2">
+            <a:schemeClr val="accent1">
+              <a:shade val="15000"/>
+            </a:schemeClr>
+          </a:lnRef>
+          <a:fillRef idx="1">
+            <a:schemeClr val="accent1"/>
+          </a:fillRef>
+          <a:effectRef idx="0">
+            <a:schemeClr val="accent1"/>
+          </a:effectRef>
+          <a:fontRef idx="minor">
+            <a:schemeClr val="lt1"/>
+          </a:fontRef>
+        </p:style>
+        <p:txBody>
+          <a:bodyPr rtlCol="0" anchor="ctr"/>
+          <a:lstStyle/>
+          <a:p>
+            <a:pPr algn="ctr"/>
+            <a:endParaRPr lang="en-US"/>
+          </a:p>
+        </p:txBody>
+      </p:sp>
+      <p:sp>
+        <p:nvSpPr>
+          <p:cNvPr id="39" name="Right Triangle 38">
+            <a:extLst>
+              <a:ext uri="{FF2B5EF4-FFF2-40B4-BE49-F238E27FC236}">
+                <a16:creationId xmlns:a16="http://schemas.microsoft.com/office/drawing/2014/main" id="{0682520E-19FB-571F-742B-43916FB97130}"/>
+              </a:ext>
+            </a:extLst>
+          </p:cNvPr>
+          <p:cNvSpPr/>
+          <p:nvPr/>
+        </p:nvSpPr>
+        <p:spPr>
+          <a:xfrm rot="10800000">
+            <a:off x="4419606" y="1902200"/>
+            <a:ext cx="315686" cy="275240"/>
+          </a:xfrm>
+          <a:prstGeom prst="rtTriangle">
+            <a:avLst/>
+          </a:prstGeom>
+          <a:solidFill>
+            <a:schemeClr val="bg1">
+              <a:lumMod val="85000"/>
+            </a:schemeClr>
+          </a:solidFill>
+          <a:ln>
+            <a:noFill/>
+          </a:ln>
+        </p:spPr>
+        <p:style>
+          <a:lnRef idx="2">
+            <a:schemeClr val="accent1">
+              <a:shade val="15000"/>
+            </a:schemeClr>
+          </a:lnRef>
+          <a:fillRef idx="1">
+            <a:schemeClr val="accent1"/>
+          </a:fillRef>
+          <a:effectRef idx="0">
+            <a:schemeClr val="accent1"/>
+          </a:effectRef>
+          <a:fontRef idx="minor">
+            <a:schemeClr val="lt1"/>
+          </a:fontRef>
+        </p:style>
+        <p:txBody>
+          <a:bodyPr rtlCol="0" anchor="ctr"/>
+          <a:lstStyle/>
+          <a:p>
+            <a:pPr algn="ctr"/>
+            <a:endParaRPr lang="en-US"/>
+          </a:p>
+        </p:txBody>
+      </p:sp>
+      <p:sp>
+        <p:nvSpPr>
+          <p:cNvPr id="40" name="Right Triangle 39">
+            <a:extLst>
+              <a:ext uri="{FF2B5EF4-FFF2-40B4-BE49-F238E27FC236}">
+                <a16:creationId xmlns:a16="http://schemas.microsoft.com/office/drawing/2014/main" id="{FD633371-B5A6-DBEE-3E61-9963A577F375}"/>
+              </a:ext>
+            </a:extLst>
+          </p:cNvPr>
+          <p:cNvSpPr/>
+          <p:nvPr/>
+        </p:nvSpPr>
+        <p:spPr>
+          <a:xfrm flipH="1">
+            <a:off x="4414972" y="1897414"/>
+            <a:ext cx="306997" cy="275240"/>
+          </a:xfrm>
+          <a:prstGeom prst="rtTriangle">
+            <a:avLst/>
+          </a:prstGeom>
+          <a:solidFill>
+            <a:schemeClr val="bg1">
+              <a:lumMod val="85000"/>
+            </a:schemeClr>
+          </a:solidFill>
+          <a:ln>
+            <a:noFill/>
+          </a:ln>
+        </p:spPr>
+        <p:style>
+          <a:lnRef idx="2">
+            <a:schemeClr val="accent1">
+              <a:shade val="15000"/>
+            </a:schemeClr>
+          </a:lnRef>
+          <a:fillRef idx="1">
+            <a:schemeClr val="accent1"/>
+          </a:fillRef>
+          <a:effectRef idx="0">
+            <a:schemeClr val="accent1"/>
+          </a:effectRef>
+          <a:fontRef idx="minor">
+            <a:schemeClr val="lt1"/>
+          </a:fontRef>
+        </p:style>
+        <p:txBody>
+          <a:bodyPr rtlCol="0" anchor="ctr"/>
+          <a:lstStyle/>
+          <a:p>
+            <a:pPr algn="ctr"/>
+            <a:endParaRPr lang="en-US"/>
+          </a:p>
+        </p:txBody>
+      </p:sp>
+      <p:sp>
+        <p:nvSpPr>
+          <p:cNvPr id="41" name="Rectangle 40">
+            <a:extLst>
+              <a:ext uri="{FF2B5EF4-FFF2-40B4-BE49-F238E27FC236}">
+                <a16:creationId xmlns:a16="http://schemas.microsoft.com/office/drawing/2014/main" id="{5660F785-45C5-13C0-C8D5-624025F86367}"/>
+              </a:ext>
+            </a:extLst>
+          </p:cNvPr>
+          <p:cNvSpPr/>
+          <p:nvPr/>
+        </p:nvSpPr>
+        <p:spPr>
+          <a:xfrm>
+            <a:off x="5475520" y="3023953"/>
+            <a:ext cx="664027" cy="1000259"/>
+          </a:xfrm>
+          <a:prstGeom prst="rect">
+            <a:avLst/>
+          </a:prstGeom>
+          <a:noFill/>
+          <a:ln w="25400"/>
+        </p:spPr>
+        <p:style>
+          <a:lnRef idx="2">
+            <a:schemeClr val="accent1">
+              <a:shade val="15000"/>
+            </a:schemeClr>
+          </a:lnRef>
+          <a:fillRef idx="1">
+            <a:schemeClr val="accent1"/>
+          </a:fillRef>
+          <a:effectRef idx="0">
+            <a:schemeClr val="accent1"/>
+          </a:effectRef>
+          <a:fontRef idx="minor">
+            <a:schemeClr val="lt1"/>
+          </a:fontRef>
+        </p:style>
+        <p:txBody>
+          <a:bodyPr rtlCol="0" anchor="ctr"/>
+          <a:lstStyle/>
+          <a:p>
+            <a:pPr algn="ctr"/>
+            <a:endParaRPr lang="en-US"/>
+          </a:p>
+        </p:txBody>
+      </p:sp>
+      <p:sp>
+        <p:nvSpPr>
+          <p:cNvPr id="42" name="Rectangle 41">
+            <a:extLst>
+              <a:ext uri="{FF2B5EF4-FFF2-40B4-BE49-F238E27FC236}">
+                <a16:creationId xmlns:a16="http://schemas.microsoft.com/office/drawing/2014/main" id="{8B5C17A9-1E28-B17F-FD1A-BCC260B47CFC}"/>
+              </a:ext>
+            </a:extLst>
+          </p:cNvPr>
+          <p:cNvSpPr/>
+          <p:nvPr/>
+        </p:nvSpPr>
+        <p:spPr>
+          <a:xfrm>
+            <a:off x="5617034" y="3023953"/>
+            <a:ext cx="381000" cy="1000259"/>
+          </a:xfrm>
+          <a:prstGeom prst="rect">
+            <a:avLst/>
+          </a:prstGeom>
+          <a:noFill/>
+          <a:ln w="25400"/>
+        </p:spPr>
+        <p:style>
+          <a:lnRef idx="2">
+            <a:schemeClr val="accent1">
+              <a:shade val="15000"/>
+            </a:schemeClr>
+          </a:lnRef>
+          <a:fillRef idx="1">
+            <a:schemeClr val="accent1"/>
+          </a:fillRef>
+          <a:effectRef idx="0">
+            <a:schemeClr val="accent1"/>
+          </a:effectRef>
+          <a:fontRef idx="minor">
+            <a:schemeClr val="lt1"/>
+          </a:fontRef>
+        </p:style>
+        <p:txBody>
+          <a:bodyPr rtlCol="0" anchor="ctr"/>
+          <a:lstStyle/>
+          <a:p>
+            <a:pPr algn="ctr"/>
+            <a:endParaRPr lang="en-US"/>
+          </a:p>
+        </p:txBody>
+      </p:sp>
+      <p:sp>
+        <p:nvSpPr>
+          <p:cNvPr id="43" name="TextBox 42">
+            <a:extLst>
+              <a:ext uri="{FF2B5EF4-FFF2-40B4-BE49-F238E27FC236}">
+                <a16:creationId xmlns:a16="http://schemas.microsoft.com/office/drawing/2014/main" id="{FBAB446B-2EE6-3BB6-AA8F-FE650A372AAD}"/>
+              </a:ext>
+            </a:extLst>
+          </p:cNvPr>
+          <p:cNvSpPr txBox="1"/>
+          <p:nvPr/>
+        </p:nvSpPr>
+        <p:spPr>
+          <a:xfrm>
+            <a:off x="4710015" y="3326346"/>
+            <a:ext cx="703336" cy="461665"/>
+          </a:xfrm>
+          <a:prstGeom prst="rect">
+            <a:avLst/>
+          </a:prstGeom>
+          <a:noFill/>
+        </p:spPr>
+        <p:txBody>
+          <a:bodyPr wrap="square" rtlCol="0">
+            <a:spAutoFit/>
+          </a:bodyPr>
+          <a:lstStyle/>
+          <a:p>
+            <a:pPr algn="ctr"/>
+            <a:r>
+              <a:rPr lang="en-US" sz="1200" dirty="0"/>
+              <a:t>insert</a:t>
+            </a:r>
+          </a:p>
+          <a:p>
+            <a:pPr algn="ctr"/>
+            <a:r>
+              <a:rPr lang="en-US" sz="1200" dirty="0"/>
+              <a:t>bushing</a:t>
+            </a:r>
+          </a:p>
+        </p:txBody>
+      </p:sp>
+      <p:sp>
+        <p:nvSpPr>
+          <p:cNvPr id="44" name="Rectangle 43">
+            <a:extLst>
+              <a:ext uri="{FF2B5EF4-FFF2-40B4-BE49-F238E27FC236}">
+                <a16:creationId xmlns:a16="http://schemas.microsoft.com/office/drawing/2014/main" id="{93CA4992-D4D1-0186-EE49-6A3F0AD3301B}"/>
+              </a:ext>
+            </a:extLst>
+          </p:cNvPr>
+          <p:cNvSpPr/>
+          <p:nvPr/>
+        </p:nvSpPr>
+        <p:spPr>
+          <a:xfrm>
+            <a:off x="5475520" y="4104695"/>
+            <a:ext cx="141514" cy="279969"/>
+          </a:xfrm>
+          <a:prstGeom prst="rect">
+            <a:avLst/>
+          </a:prstGeom>
+          <a:noFill/>
+          <a:ln w="25400"/>
+        </p:spPr>
+        <p:style>
+          <a:lnRef idx="2">
+            <a:schemeClr val="accent1">
+              <a:shade val="15000"/>
+            </a:schemeClr>
+          </a:lnRef>
+          <a:fillRef idx="1">
+            <a:schemeClr val="accent1"/>
+          </a:fillRef>
+          <a:effectRef idx="0">
+            <a:schemeClr val="accent1"/>
+          </a:effectRef>
+          <a:fontRef idx="minor">
+            <a:schemeClr val="lt1"/>
+          </a:fontRef>
+        </p:style>
+        <p:txBody>
+          <a:bodyPr rtlCol="0" anchor="ctr"/>
+          <a:lstStyle/>
+          <a:p>
+            <a:pPr algn="ctr"/>
+            <a:endParaRPr lang="en-US"/>
+          </a:p>
+        </p:txBody>
+      </p:sp>
+      <p:sp>
+        <p:nvSpPr>
+          <p:cNvPr id="45" name="Rectangle 44">
+            <a:extLst>
+              <a:ext uri="{FF2B5EF4-FFF2-40B4-BE49-F238E27FC236}">
+                <a16:creationId xmlns:a16="http://schemas.microsoft.com/office/drawing/2014/main" id="{93A0B0CF-10DE-66AD-B6BB-F4D0334FA94E}"/>
+              </a:ext>
+            </a:extLst>
+          </p:cNvPr>
+          <p:cNvSpPr/>
+          <p:nvPr/>
+        </p:nvSpPr>
+        <p:spPr>
+          <a:xfrm>
+            <a:off x="5998034" y="4104693"/>
+            <a:ext cx="141514" cy="279969"/>
+          </a:xfrm>
+          <a:prstGeom prst="rect">
+            <a:avLst/>
+          </a:prstGeom>
+          <a:noFill/>
+          <a:ln w="25400"/>
+        </p:spPr>
+        <p:style>
+          <a:lnRef idx="2">
+            <a:schemeClr val="accent1">
+              <a:shade val="15000"/>
+            </a:schemeClr>
+          </a:lnRef>
+          <a:fillRef idx="1">
+            <a:schemeClr val="accent1"/>
+          </a:fillRef>
+          <a:effectRef idx="0">
+            <a:schemeClr val="accent1"/>
+          </a:effectRef>
+          <a:fontRef idx="minor">
+            <a:schemeClr val="lt1"/>
+          </a:fontRef>
+        </p:style>
+        <p:txBody>
+          <a:bodyPr rtlCol="0" anchor="ctr"/>
+          <a:lstStyle/>
+          <a:p>
+            <a:pPr algn="ctr"/>
+            <a:endParaRPr lang="en-US"/>
+          </a:p>
+        </p:txBody>
+      </p:sp>
+      <p:pic>
+        <p:nvPicPr>
+          <p:cNvPr id="1028" name="Picture 4" descr="John Deere M153583 Pulley Spindle Nut">
+            <a:extLst>
+              <a:ext uri="{FF2B5EF4-FFF2-40B4-BE49-F238E27FC236}">
+                <a16:creationId xmlns:a16="http://schemas.microsoft.com/office/drawing/2014/main" id="{97C7AD85-419F-4B4A-D347-C54567A7490F}"/>
+              </a:ext>
+            </a:extLst>
+          </p:cNvPr>
+          <p:cNvPicPr>
+            <a:picLocks noChangeAspect="1" noChangeArrowheads="1"/>
+          </p:cNvPicPr>
+          <p:nvPr/>
+        </p:nvPicPr>
+        <p:blipFill>
+          <a:blip r:embed="rId7" cstate="email">
+            <a:extLst>
+              <a:ext uri="{28A0092B-C50C-407E-A947-70E740481C1C}">
+                <a14:useLocalDpi xmlns:a14="http://schemas.microsoft.com/office/drawing/2010/main"/>
+              </a:ext>
+            </a:extLst>
+          </a:blip>
+          <a:srcRect/>
+          <a:stretch>
+            <a:fillRect/>
+          </a:stretch>
+        </p:blipFill>
+        <p:spPr bwMode="auto">
+          <a:xfrm>
+            <a:off x="5453749" y="1069920"/>
+            <a:ext cx="715569" cy="715569"/>
+          </a:xfrm>
+          <a:prstGeom prst="rect">
+            <a:avLst/>
+          </a:prstGeom>
+          <a:noFill/>
+          <a:extLst>
+            <a:ext uri="{909E8E84-426E-40DD-AFC4-6F175D3DCCD1}">
+              <a14:hiddenFill xmlns:a14="http://schemas.microsoft.com/office/drawing/2010/main">
+                <a:solidFill>
+                  <a:srgbClr val="FFFFFF"/>
+                </a:solidFill>
+              </a14:hiddenFill>
+            </a:ext>
+          </a:extLst>
+        </p:spPr>
+      </p:pic>
+      <p:sp>
+        <p:nvSpPr>
+          <p:cNvPr id="46" name="TextBox 45">
+            <a:extLst>
+              <a:ext uri="{FF2B5EF4-FFF2-40B4-BE49-F238E27FC236}">
+                <a16:creationId xmlns:a16="http://schemas.microsoft.com/office/drawing/2014/main" id="{9DF9BB92-8DEF-3C11-F0EE-5E6771AB4CB8}"/>
+              </a:ext>
+            </a:extLst>
+          </p:cNvPr>
+          <p:cNvSpPr txBox="1"/>
+          <p:nvPr/>
+        </p:nvSpPr>
+        <p:spPr>
+          <a:xfrm>
+            <a:off x="4809206" y="1331820"/>
+            <a:ext cx="703336" cy="276999"/>
+          </a:xfrm>
+          <a:prstGeom prst="rect">
+            <a:avLst/>
+          </a:prstGeom>
+          <a:noFill/>
+        </p:spPr>
+        <p:txBody>
+          <a:bodyPr wrap="square" rtlCol="0">
+            <a:spAutoFit/>
+          </a:bodyPr>
+          <a:lstStyle/>
+          <a:p>
+            <a:pPr algn="ctr"/>
+            <a:r>
+              <a:rPr lang="en-US" sz="1200" dirty="0"/>
+              <a:t>nut</a:t>
+            </a:r>
+          </a:p>
+        </p:txBody>
+      </p:sp>
+      <p:sp>
+        <p:nvSpPr>
+          <p:cNvPr id="47" name="TextBox 46">
+            <a:extLst>
+              <a:ext uri="{FF2B5EF4-FFF2-40B4-BE49-F238E27FC236}">
+                <a16:creationId xmlns:a16="http://schemas.microsoft.com/office/drawing/2014/main" id="{4B12CDF8-84A5-F958-A6BA-14043B75845E}"/>
+              </a:ext>
+            </a:extLst>
+          </p:cNvPr>
+          <p:cNvSpPr txBox="1"/>
+          <p:nvPr/>
+        </p:nvSpPr>
+        <p:spPr>
+          <a:xfrm>
+            <a:off x="4202826" y="2207634"/>
+            <a:ext cx="1268637" cy="461665"/>
+          </a:xfrm>
+          <a:prstGeom prst="rect">
+            <a:avLst/>
+          </a:prstGeom>
+          <a:noFill/>
+        </p:spPr>
+        <p:txBody>
+          <a:bodyPr wrap="square" rtlCol="0">
+            <a:spAutoFit/>
+          </a:bodyPr>
+          <a:lstStyle/>
+          <a:p>
+            <a:pPr algn="ctr"/>
+            <a:r>
+              <a:rPr lang="en-US" sz="1200" dirty="0"/>
+              <a:t>bushing </a:t>
+            </a:r>
+          </a:p>
+          <a:p>
+            <a:pPr algn="ctr"/>
+            <a:r>
+              <a:rPr lang="en-US" sz="1200" dirty="0"/>
+              <a:t>(spacer, washer)</a:t>
+            </a:r>
+          </a:p>
+        </p:txBody>
+      </p:sp>
+      <p:pic>
+        <p:nvPicPr>
+          <p:cNvPr id="3" name="Picture 2">
+            <a:extLst>
+              <a:ext uri="{FF2B5EF4-FFF2-40B4-BE49-F238E27FC236}">
+                <a16:creationId xmlns:a16="http://schemas.microsoft.com/office/drawing/2014/main" id="{81A4B17E-5CBA-0685-0D19-C28748ED9F45}"/>
+              </a:ext>
+            </a:extLst>
+          </p:cNvPr>
+          <p:cNvPicPr>
+            <a:picLocks noChangeAspect="1"/>
+          </p:cNvPicPr>
+          <p:nvPr/>
+        </p:nvPicPr>
+        <p:blipFill>
+          <a:blip r:embed="rId8" cstate="email">
+            <a:extLst>
+              <a:ext uri="{28A0092B-C50C-407E-A947-70E740481C1C}">
+                <a14:useLocalDpi xmlns:a14="http://schemas.microsoft.com/office/drawing/2010/main"/>
+              </a:ext>
+            </a:extLst>
+          </a:blip>
+          <a:stretch>
+            <a:fillRect/>
+          </a:stretch>
+        </p:blipFill>
+        <p:spPr>
+          <a:xfrm>
+            <a:off x="186857" y="4586338"/>
+            <a:ext cx="1971754" cy="1967382"/>
+          </a:xfrm>
+          <a:prstGeom prst="rect">
+            <a:avLst/>
+          </a:prstGeom>
+        </p:spPr>
+      </p:pic>
+      <p:sp>
+        <p:nvSpPr>
+          <p:cNvPr id="4" name="TextBox 3">
+            <a:extLst>
+              <a:ext uri="{FF2B5EF4-FFF2-40B4-BE49-F238E27FC236}">
+                <a16:creationId xmlns:a16="http://schemas.microsoft.com/office/drawing/2014/main" id="{2136CE1B-25DC-A85E-6601-2AF77025DD82}"/>
+              </a:ext>
+            </a:extLst>
+          </p:cNvPr>
+          <p:cNvSpPr txBox="1"/>
+          <p:nvPr/>
+        </p:nvSpPr>
+        <p:spPr>
+          <a:xfrm>
+            <a:off x="748752" y="4275247"/>
+            <a:ext cx="1022350" cy="276999"/>
+          </a:xfrm>
+          <a:prstGeom prst="rect">
+            <a:avLst/>
+          </a:prstGeom>
+          <a:noFill/>
+        </p:spPr>
+        <p:txBody>
+          <a:bodyPr wrap="square" rtlCol="0">
+            <a:spAutoFit/>
+          </a:bodyPr>
+          <a:lstStyle/>
+          <a:p>
+            <a:pPr algn="ctr"/>
+            <a:r>
+              <a:rPr lang="en-US" sz="1200" dirty="0"/>
+              <a:t>spindle hub</a:t>
+            </a:r>
+          </a:p>
+        </p:txBody>
+      </p:sp>
+      <p:pic>
+        <p:nvPicPr>
+          <p:cNvPr id="5" name="Picture 4">
+            <a:extLst>
+              <a:ext uri="{FF2B5EF4-FFF2-40B4-BE49-F238E27FC236}">
+                <a16:creationId xmlns:a16="http://schemas.microsoft.com/office/drawing/2014/main" id="{0E6397A7-59A1-342E-F7B6-1E0DEFED6931}"/>
+              </a:ext>
+            </a:extLst>
+          </p:cNvPr>
+          <p:cNvPicPr>
+            <a:picLocks noChangeAspect="1"/>
+          </p:cNvPicPr>
+          <p:nvPr/>
+        </p:nvPicPr>
+        <p:blipFill>
+          <a:blip r:embed="rId9" cstate="email">
+            <a:extLst>
+              <a:ext uri="{28A0092B-C50C-407E-A947-70E740481C1C}">
+                <a14:useLocalDpi xmlns:a14="http://schemas.microsoft.com/office/drawing/2010/main"/>
+              </a:ext>
+            </a:extLst>
+          </a:blip>
+          <a:stretch>
+            <a:fillRect/>
+          </a:stretch>
+        </p:blipFill>
+        <p:spPr>
+          <a:xfrm>
+            <a:off x="9996055" y="3000161"/>
+            <a:ext cx="2104634" cy="2464704"/>
+          </a:xfrm>
+          <a:prstGeom prst="rect">
+            <a:avLst/>
+          </a:prstGeom>
+        </p:spPr>
+      </p:pic>
+      <p:pic>
+        <p:nvPicPr>
+          <p:cNvPr id="6" name="Picture 5">
+            <a:extLst>
+              <a:ext uri="{FF2B5EF4-FFF2-40B4-BE49-F238E27FC236}">
+                <a16:creationId xmlns:a16="http://schemas.microsoft.com/office/drawing/2014/main" id="{11E098BF-90CF-94DE-AF1B-1B0E120DA42C}"/>
+              </a:ext>
+            </a:extLst>
+          </p:cNvPr>
+          <p:cNvPicPr>
+            <a:picLocks noChangeAspect="1"/>
+          </p:cNvPicPr>
+          <p:nvPr/>
+        </p:nvPicPr>
+        <p:blipFill>
+          <a:blip r:embed="rId10" cstate="email">
+            <a:extLst>
+              <a:ext uri="{28A0092B-C50C-407E-A947-70E740481C1C}">
+                <a14:useLocalDpi xmlns:a14="http://schemas.microsoft.com/office/drawing/2010/main"/>
+              </a:ext>
+            </a:extLst>
+          </a:blip>
+          <a:stretch>
+            <a:fillRect/>
+          </a:stretch>
+        </p:blipFill>
+        <p:spPr>
+          <a:xfrm>
+            <a:off x="9116297" y="3065993"/>
+            <a:ext cx="1742280" cy="1209254"/>
+          </a:xfrm>
+          <a:prstGeom prst="rect">
+            <a:avLst/>
+          </a:prstGeom>
+          <a:ln>
+            <a:solidFill>
+              <a:srgbClr val="FF0000"/>
+            </a:solidFill>
+          </a:ln>
+        </p:spPr>
+      </p:pic>
+      <p:sp>
+        <p:nvSpPr>
+          <p:cNvPr id="8" name="TextBox 7">
+            <a:extLst>
+              <a:ext uri="{FF2B5EF4-FFF2-40B4-BE49-F238E27FC236}">
+                <a16:creationId xmlns:a16="http://schemas.microsoft.com/office/drawing/2014/main" id="{C3F81A96-5DF9-E7E3-1385-F0305F33DAC6}"/>
+              </a:ext>
+            </a:extLst>
+          </p:cNvPr>
+          <p:cNvSpPr txBox="1"/>
+          <p:nvPr/>
+        </p:nvSpPr>
+        <p:spPr>
+          <a:xfrm>
+            <a:off x="8966703" y="5233313"/>
+            <a:ext cx="1020734" cy="461665"/>
+          </a:xfrm>
+          <a:prstGeom prst="rect">
+            <a:avLst/>
+          </a:prstGeom>
+          <a:noFill/>
+        </p:spPr>
+        <p:txBody>
+          <a:bodyPr wrap="square" rtlCol="0">
+            <a:spAutoFit/>
+          </a:bodyPr>
+          <a:lstStyle/>
+          <a:p>
+            <a:pPr algn="ctr"/>
+            <a:r>
+              <a:rPr lang="en-US" sz="1200" dirty="0"/>
+              <a:t>spindle shaft woodruff key</a:t>
+            </a:r>
+          </a:p>
+        </p:txBody>
+      </p:sp>
+      <p:pic>
+        <p:nvPicPr>
+          <p:cNvPr id="10" name="Picture 9">
+            <a:extLst>
+              <a:ext uri="{FF2B5EF4-FFF2-40B4-BE49-F238E27FC236}">
+                <a16:creationId xmlns:a16="http://schemas.microsoft.com/office/drawing/2014/main" id="{E49846F6-439C-0000-A00D-E5D1BE1065CE}"/>
+              </a:ext>
+            </a:extLst>
+          </p:cNvPr>
+          <p:cNvPicPr>
+            <a:picLocks noChangeAspect="1"/>
+          </p:cNvPicPr>
+          <p:nvPr/>
+        </p:nvPicPr>
+        <p:blipFill>
+          <a:blip r:embed="rId11" cstate="email">
+            <a:extLst>
+              <a:ext uri="{28A0092B-C50C-407E-A947-70E740481C1C}">
+                <a14:useLocalDpi xmlns:a14="http://schemas.microsoft.com/office/drawing/2010/main"/>
+              </a:ext>
+            </a:extLst>
+          </a:blip>
+          <a:stretch>
+            <a:fillRect/>
+          </a:stretch>
+        </p:blipFill>
+        <p:spPr>
+          <a:xfrm>
+            <a:off x="9028406" y="4392361"/>
+            <a:ext cx="703281" cy="323321"/>
+          </a:xfrm>
+          <a:prstGeom prst="rect">
+            <a:avLst/>
+          </a:prstGeom>
+        </p:spPr>
+      </p:pic>
+      <p:pic>
+        <p:nvPicPr>
+          <p:cNvPr id="11" name="Picture 10">
+            <a:extLst>
+              <a:ext uri="{FF2B5EF4-FFF2-40B4-BE49-F238E27FC236}">
+                <a16:creationId xmlns:a16="http://schemas.microsoft.com/office/drawing/2014/main" id="{7FD5FEC5-7354-E076-481A-F4ACA9D8CD2B}"/>
+              </a:ext>
+            </a:extLst>
+          </p:cNvPr>
+          <p:cNvPicPr>
+            <a:picLocks noChangeAspect="1"/>
+          </p:cNvPicPr>
+          <p:nvPr/>
+        </p:nvPicPr>
+        <p:blipFill>
+          <a:blip r:embed="rId12" cstate="email">
+            <a:extLst>
+              <a:ext uri="{28A0092B-C50C-407E-A947-70E740481C1C}">
+                <a14:useLocalDpi xmlns:a14="http://schemas.microsoft.com/office/drawing/2010/main"/>
+              </a:ext>
+            </a:extLst>
+          </a:blip>
+          <a:stretch>
+            <a:fillRect/>
+          </a:stretch>
+        </p:blipFill>
+        <p:spPr>
+          <a:xfrm>
+            <a:off x="9046625" y="4792878"/>
+            <a:ext cx="699400" cy="450844"/>
+          </a:xfrm>
+          <a:prstGeom prst="rect">
+            <a:avLst/>
+          </a:prstGeom>
+        </p:spPr>
+      </p:pic>
+      <p:sp>
+        <p:nvSpPr>
+          <p:cNvPr id="13" name="TextBox 12">
+            <a:extLst>
+              <a:ext uri="{FF2B5EF4-FFF2-40B4-BE49-F238E27FC236}">
+                <a16:creationId xmlns:a16="http://schemas.microsoft.com/office/drawing/2014/main" id="{6FCA6B48-4739-76F1-047A-5D29C25C80AB}"/>
+              </a:ext>
+            </a:extLst>
+          </p:cNvPr>
+          <p:cNvSpPr txBox="1"/>
+          <p:nvPr/>
+        </p:nvSpPr>
+        <p:spPr>
+          <a:xfrm>
+            <a:off x="7147980" y="4520978"/>
+            <a:ext cx="1720674" cy="830997"/>
+          </a:xfrm>
+          <a:prstGeom prst="rect">
+            <a:avLst/>
+          </a:prstGeom>
+          <a:noFill/>
+        </p:spPr>
+        <p:txBody>
+          <a:bodyPr wrap="square" rtlCol="0">
+            <a:spAutoFit/>
+          </a:bodyPr>
+          <a:lstStyle/>
+          <a:p>
+            <a:pPr algn="ctr"/>
+            <a:r>
+              <a:rPr lang="en-US" sz="1200" dirty="0"/>
+              <a:t>Woodruff keys are semi-circular discs used to connect shaft and pulley to rotate together</a:t>
+            </a:r>
+          </a:p>
+        </p:txBody>
+      </p:sp>
+      <p:pic>
+        <p:nvPicPr>
+          <p:cNvPr id="16" name="Picture 15">
+            <a:extLst>
+              <a:ext uri="{FF2B5EF4-FFF2-40B4-BE49-F238E27FC236}">
+                <a16:creationId xmlns:a16="http://schemas.microsoft.com/office/drawing/2014/main" id="{6A334A0A-24D7-6C9F-E2E7-4322B416BF34}"/>
+              </a:ext>
+            </a:extLst>
+          </p:cNvPr>
+          <p:cNvPicPr>
+            <a:picLocks noChangeAspect="1"/>
+          </p:cNvPicPr>
+          <p:nvPr/>
+        </p:nvPicPr>
+        <p:blipFill>
+          <a:blip r:embed="rId13" cstate="email">
+            <a:extLst>
+              <a:ext uri="{28A0092B-C50C-407E-A947-70E740481C1C}">
+                <a14:useLocalDpi xmlns:a14="http://schemas.microsoft.com/office/drawing/2010/main"/>
+              </a:ext>
+            </a:extLst>
+          </a:blip>
+          <a:stretch>
+            <a:fillRect/>
+          </a:stretch>
+        </p:blipFill>
+        <p:spPr>
+          <a:xfrm>
+            <a:off x="7507607" y="5923035"/>
+            <a:ext cx="1742280" cy="625149"/>
+          </a:xfrm>
+          <a:prstGeom prst="rect">
+            <a:avLst/>
+          </a:prstGeom>
+          <a:ln>
+            <a:solidFill>
+              <a:schemeClr val="accent1"/>
+            </a:solidFill>
+          </a:ln>
+        </p:spPr>
+      </p:pic>
+    </p:spTree>
+    <p:extLst>
+      <p:ext uri="{BB962C8B-B14F-4D97-AF65-F5344CB8AC3E}">
+        <p14:creationId xmlns:p14="http://schemas.microsoft.com/office/powerpoint/2010/main" val="3231152173"/>
+      </p:ext>
+    </p:extLst>
+  </p:cSld>
+  <p:clrMapOvr>
+    <a:masterClrMapping/>
+  </p:clrMapOvr>
+</p:sld>
+</file>
+
 <file path=ppt/theme/theme1.xml><?xml version="1.0" encoding="utf-8"?>
 <a:theme xmlns:a="http://schemas.openxmlformats.org/drawingml/2006/main" name="Office Theme">
   <a:themeElements>
